--- a/content/decks/pre-a-level-art-design/pal-intro-01-welcome-to-the-course.pptx
+++ b/content/decks/pre-a-level-art-design/pal-intro-01-welcome-to-the-course.pptx
@@ -3206,7 +3206,7 @@
       </p:grpSpPr>
       <p:pic>
         <p:nvPicPr>
-          <p:cNvPr id="2" name="Image 0" descr="/private/tmp/claude-501/-Users-dogan-Documents-Vaults-Courses/3954bcc8-cc8d-4110-bd5a-74962061a805/scratchpad/decks/img/crops/repin-tolstoy_a1777.jpg">    </p:cNvPr>
+          <p:cNvPr id="2" name="Image 0" descr="/Users/dogan/Documents/Vaults/Courses/wiki/classes/pre-a-level-art-design/decks/_build/img/crops/repin-tolstoy_a1777.jpg">    </p:cNvPr>
           <p:cNvPicPr>
             <a:picLocks noChangeAspect="1"/>
           </p:cNvPicPr>
@@ -4321,7 +4321,7 @@
       </p:sp>
       <p:pic>
         <p:nvPicPr>
-          <p:cNvPr id="6" name="Image 0" descr="/private/tmp/claude-501/-Users-dogan-Documents-Vaults-Courses/3954bcc8-cc8d-4110-bd5a-74962061a805/scratchpad/decks/img/repin-naked-sketch.jpg">    </p:cNvPr>
+          <p:cNvPr id="6" name="Image 0" descr="/Users/dogan/Documents/Vaults/Courses/wiki/classes/pre-a-level-art-design/decks/_build/img/repin-murashko.jpg">    </p:cNvPr>
           <p:cNvPicPr>
             <a:picLocks noChangeAspect="1"/>
           </p:cNvPicPr>
@@ -4335,8 +4335,8 @@
         </p:blipFill>
         <p:spPr>
           <a:xfrm>
-            <a:off x="966072" y="1362456"/>
-            <a:ext cx="2143795" cy="3310128"/>
+            <a:off x="950976" y="1570466"/>
+            <a:ext cx="2173986" cy="2894108"/>
           </a:xfrm>
           <a:prstGeom prst="rect">
             <a:avLst/>
@@ -4409,7 +4409,7 @@
       </p:sp>
       <p:pic>
         <p:nvPicPr>
-          <p:cNvPr id="9" name="Image 1" descr="/private/tmp/claude-501/-Users-dogan-Documents-Vaults-Courses/3954bcc8-cc8d-4110-bd5a-74962061a805/scratchpad/decks/img/atget-rue-mazet.jpg">    </p:cNvPr>
+          <p:cNvPr id="9" name="Image 1" descr="/Users/dogan/Documents/Vaults/Courses/wiki/classes/pre-a-level-art-design/decks/_build/img/atget-rue-mazet.jpg">    </p:cNvPr>
           <p:cNvPicPr>
             <a:picLocks noChangeAspect="1"/>
           </p:cNvPicPr>
@@ -4497,7 +4497,7 @@
       </p:sp>
       <p:pic>
         <p:nvPicPr>
-          <p:cNvPr id="12" name="Image 2" descr="/private/tmp/claude-501/-Users-dogan-Documents-Vaults-Courses/3954bcc8-cc8d-4110-bd5a-74962061a805/scratchpad/decks/img/muybridge-foreshortenings.jpg">    </p:cNvPr>
+          <p:cNvPr id="12" name="Image 2" descr="/Users/dogan/Documents/Vaults/Courses/wiki/classes/pre-a-level-art-design/decks/_build/img/muybridge-foreshortenings.jpg">    </p:cNvPr>
           <p:cNvPicPr>
             <a:picLocks noChangeAspect="1"/>
           </p:cNvPicPr>
@@ -4585,7 +4585,7 @@
       </p:sp>
       <p:pic>
         <p:nvPicPr>
-          <p:cNvPr id="15" name="Image 3" descr="/private/tmp/claude-501/-Users-dogan-Documents-Vaults-Courses/3954bcc8-cc8d-4110-bd5a-74962061a805/scratchpad/decks/img/mucha-cherry-blossom.jpg">    </p:cNvPr>
+          <p:cNvPr id="15" name="Image 3" descr="/Users/dogan/Documents/Vaults/Courses/wiki/classes/pre-a-level-art-design/decks/_build/img/mucha-cherry-blossom.jpg">    </p:cNvPr>
           <p:cNvPicPr>
             <a:picLocks noChangeAspect="1"/>
           </p:cNvPicPr>
@@ -4820,7 +4820,7 @@
       </p:grpSpPr>
       <p:pic>
         <p:nvPicPr>
-          <p:cNvPr id="2" name="Image 0" descr="/private/tmp/claude-501/-Users-dogan-Documents-Vaults-Courses/3954bcc8-cc8d-4110-bd5a-74962061a805/scratchpad/decks/img/crops/rubens-sheet-forearm_a691.jpg">    </p:cNvPr>
+          <p:cNvPr id="2" name="Image 0" descr="/Users/dogan/Documents/Vaults/Courses/wiki/classes/pre-a-level-art-design/decks/_build/img/crops/rubens-sheet-forearm_a691.jpg">    </p:cNvPr>
           <p:cNvPicPr>
             <a:picLocks noChangeAspect="1"/>
           </p:cNvPicPr>
